--- a/example5-transposed/results/report.pptx
+++ b/example5-transposed/results/report.pptx
@@ -10,7 +10,7 @@
   <p:handoutMasterIdLst>
     <p:handoutMasterId r:id="rId3"/>
   </p:handoutMasterIdLst>
-  <p:sldIdLst xmlns:a="http://schemas.openxmlformats.org/drawingml/2006/main" xmlns:r="http://schemas.openxmlformats.org/officeDocument/2006/relationships" xmlns:p="http://schemas.openxmlformats.org/presentationml/2006/main">
+  <p:sldIdLst>
     <p:sldId id="256" r:id="rId8"/>
     <p:sldId id="257" r:id="rId9"/>
     <p:sldId id="258" r:id="rId10"/>
@@ -1793,7 +1793,7 @@
           <a:chExt cx="0" cy="0"/>
         </a:xfrm>
       </p:grpSpPr>
-      <p:sp xmlns:a="http://schemas.openxmlformats.org/drawingml/2006/main" xmlns:r="http://schemas.openxmlformats.org/officeDocument/2006/relationships" xmlns:p="http://schemas.openxmlformats.org/presentationml/2006/main">
+      <p:sp>
         <p:nvSpPr>
           <p:cNvPr id="2" name="Title 1"/>
           <p:cNvSpPr>
@@ -1820,7 +1820,7 @@
           </a:p>
         </p:txBody>
       </p:sp>
-      <p:sp xmlns:a="http://schemas.openxmlformats.org/drawingml/2006/main" xmlns:r="http://schemas.openxmlformats.org/officeDocument/2006/relationships" xmlns:p="http://schemas.openxmlformats.org/presentationml/2006/main">
+      <p:sp>
         <p:nvSpPr>
           <p:cNvPr id="3" name="Subtitle 2"/>
           <p:cNvSpPr>
@@ -1872,7 +1872,7 @@
           <a:chExt cx="0" cy="0"/>
         </a:xfrm>
       </p:grpSpPr>
-      <p:sp xmlns:a="http://schemas.openxmlformats.org/drawingml/2006/main" xmlns:r="http://schemas.openxmlformats.org/officeDocument/2006/relationships" xmlns:p="http://schemas.openxmlformats.org/presentationml/2006/main">
+      <p:sp>
         <p:nvSpPr>
           <p:cNvPr id="2" name="Title 1"/>
           <p:cNvSpPr>
@@ -1899,7 +1899,7 @@
           </a:p>
         </p:txBody>
       </p:sp>
-      <p:sp xmlns:a="http://schemas.openxmlformats.org/drawingml/2006/main" xmlns:r="http://schemas.openxmlformats.org/officeDocument/2006/relationships" xmlns:p="http://schemas.openxmlformats.org/presentationml/2006/main">
+      <p:sp>
         <p:nvSpPr>
           <p:cNvPr id="3" name="Text Placeholder 4"/>
           <p:cNvSpPr>
@@ -1921,12 +1921,12 @@
           <a:p>
             <a:r>
               <a:rPr/>
-              <a:t>Differential FDR&lt;0.25</a:t>
-            </a:r>
-          </a:p>
-        </p:txBody>
-      </p:sp>
-      <p:sp xmlns:a="http://schemas.openxmlformats.org/drawingml/2006/main" xmlns:r="http://schemas.openxmlformats.org/officeDocument/2006/relationships" xmlns:p="http://schemas.openxmlformats.org/presentationml/2006/main">
+              <a:t>Differential fdr&lt;0.25</a:t>
+            </a:r>
+          </a:p>
+        </p:txBody>
+      </p:sp>
+      <p:sp>
         <p:nvSpPr>
           <p:cNvPr id="4" name="Text Placeholder 2"/>
           <p:cNvSpPr>
@@ -1948,12 +1948,12 @@
           <a:p>
             <a:r>
               <a:rPr/>
-              <a:t>Complete Set FDR=1</a:t>
-            </a:r>
-          </a:p>
-        </p:txBody>
-      </p:sp>
-      <p:pic xmlns:a="http://schemas.openxmlformats.org/drawingml/2006/main" xmlns:r="http://schemas.openxmlformats.org/officeDocument/2006/relationships" xmlns:p="http://schemas.openxmlformats.org/presentationml/2006/main">
+              <a:t>Complete Set fdr=1</a:t>
+            </a:r>
+          </a:p>
+        </p:txBody>
+      </p:sp>
+      <p:pic>
         <p:nvPicPr>
           <p:cNvPr id="5" name="" descr=""/>
           <p:cNvPicPr>
@@ -1979,7 +1979,7 @@
           </a:prstGeom>
         </p:spPr>
       </p:pic>
-      <p:pic xmlns:a="http://schemas.openxmlformats.org/drawingml/2006/main" xmlns:r="http://schemas.openxmlformats.org/officeDocument/2006/relationships" xmlns:p="http://schemas.openxmlformats.org/presentationml/2006/main">
+      <p:pic>
         <p:nvPicPr>
           <p:cNvPr id="6" name="" descr=""/>
           <p:cNvPicPr>
@@ -2030,7 +2030,7 @@
           <a:chExt cx="0" cy="0"/>
         </a:xfrm>
       </p:grpSpPr>
-      <p:sp xmlns:a="http://schemas.openxmlformats.org/drawingml/2006/main" xmlns:r="http://schemas.openxmlformats.org/officeDocument/2006/relationships" xmlns:p="http://schemas.openxmlformats.org/presentationml/2006/main">
+      <p:sp>
         <p:nvSpPr>
           <p:cNvPr id="2" name="Title 1"/>
           <p:cNvSpPr>
@@ -2057,7 +2057,7 @@
           </a:p>
         </p:txBody>
       </p:sp>
-      <p:sp xmlns:a="http://schemas.openxmlformats.org/drawingml/2006/main" xmlns:r="http://schemas.openxmlformats.org/officeDocument/2006/relationships" xmlns:p="http://schemas.openxmlformats.org/presentationml/2006/main">
+      <p:sp>
         <p:nvSpPr>
           <p:cNvPr id="3" name="Text Placeholder 4"/>
           <p:cNvSpPr>
@@ -2079,12 +2079,12 @@
           <a:p>
             <a:r>
               <a:rPr/>
-              <a:t>Differential FDR&lt;0.25</a:t>
-            </a:r>
-          </a:p>
-        </p:txBody>
-      </p:sp>
-      <p:sp xmlns:a="http://schemas.openxmlformats.org/drawingml/2006/main" xmlns:r="http://schemas.openxmlformats.org/officeDocument/2006/relationships" xmlns:p="http://schemas.openxmlformats.org/presentationml/2006/main">
+              <a:t>Differential fdr&lt;0.25</a:t>
+            </a:r>
+          </a:p>
+        </p:txBody>
+      </p:sp>
+      <p:sp>
         <p:nvSpPr>
           <p:cNvPr id="4" name="Text Placeholder 2"/>
           <p:cNvSpPr>
@@ -2106,12 +2106,12 @@
           <a:p>
             <a:r>
               <a:rPr/>
-              <a:t>Complete Set FDR=1</a:t>
-            </a:r>
-          </a:p>
-        </p:txBody>
-      </p:sp>
-      <p:pic xmlns:a="http://schemas.openxmlformats.org/drawingml/2006/main" xmlns:r="http://schemas.openxmlformats.org/officeDocument/2006/relationships" xmlns:p="http://schemas.openxmlformats.org/presentationml/2006/main">
+              <a:t>Complete Set fdr=1</a:t>
+            </a:r>
+          </a:p>
+        </p:txBody>
+      </p:sp>
+      <p:pic>
         <p:nvPicPr>
           <p:cNvPr id="5" name="" descr=""/>
           <p:cNvPicPr>
@@ -2162,7 +2162,7 @@
           <a:chExt cx="0" cy="0"/>
         </a:xfrm>
       </p:grpSpPr>
-      <p:sp xmlns:a="http://schemas.openxmlformats.org/drawingml/2006/main" xmlns:r="http://schemas.openxmlformats.org/officeDocument/2006/relationships" xmlns:p="http://schemas.openxmlformats.org/presentationml/2006/main">
+      <p:sp>
         <p:nvSpPr>
           <p:cNvPr id="2" name="Title 1"/>
           <p:cNvSpPr>
@@ -2189,7 +2189,7 @@
           </a:p>
         </p:txBody>
       </p:sp>
-      <p:sp xmlns:a="http://schemas.openxmlformats.org/drawingml/2006/main" xmlns:r="http://schemas.openxmlformats.org/officeDocument/2006/relationships" xmlns:p="http://schemas.openxmlformats.org/presentationml/2006/main">
+      <p:sp>
         <p:nvSpPr>
           <p:cNvPr id="3" name="Text Placeholder 4"/>
           <p:cNvSpPr>
@@ -2211,12 +2211,12 @@
           <a:p>
             <a:r>
               <a:rPr/>
-              <a:t>Differential FDR&lt;0.25</a:t>
-            </a:r>
-          </a:p>
-        </p:txBody>
-      </p:sp>
-      <p:sp xmlns:a="http://schemas.openxmlformats.org/drawingml/2006/main" xmlns:r="http://schemas.openxmlformats.org/officeDocument/2006/relationships" xmlns:p="http://schemas.openxmlformats.org/presentationml/2006/main">
+              <a:t>Differential fdr&lt;0.25</a:t>
+            </a:r>
+          </a:p>
+        </p:txBody>
+      </p:sp>
+      <p:sp>
         <p:nvSpPr>
           <p:cNvPr id="4" name="Text Placeholder 2"/>
           <p:cNvSpPr>
@@ -2238,12 +2238,12 @@
           <a:p>
             <a:r>
               <a:rPr/>
-              <a:t>Complete Set FDR=1</a:t>
-            </a:r>
-          </a:p>
-        </p:txBody>
-      </p:sp>
-      <p:pic xmlns:a="http://schemas.openxmlformats.org/drawingml/2006/main" xmlns:r="http://schemas.openxmlformats.org/officeDocument/2006/relationships" xmlns:p="http://schemas.openxmlformats.org/presentationml/2006/main">
+              <a:t>Complete Set fdr=1</a:t>
+            </a:r>
+          </a:p>
+        </p:txBody>
+      </p:sp>
+      <p:pic>
         <p:nvPicPr>
           <p:cNvPr id="5" name="" descr=""/>
           <p:cNvPicPr>
@@ -2269,7 +2269,7 @@
           </a:prstGeom>
         </p:spPr>
       </p:pic>
-      <p:pic xmlns:a="http://schemas.openxmlformats.org/drawingml/2006/main" xmlns:r="http://schemas.openxmlformats.org/officeDocument/2006/relationships" xmlns:p="http://schemas.openxmlformats.org/presentationml/2006/main">
+      <p:pic>
         <p:nvPicPr>
           <p:cNvPr id="6" name="" descr=""/>
           <p:cNvPicPr>
@@ -2280,7 +2280,7 @@
           </p:nvPr>
         </p:nvPicPr>
         <p:blipFill>
-          <a:blip cstate="print" r:embed="rId3"/>
+          <a:blip cstate="print" r:embed="rId2"/>
           <a:stretch>
             <a:fillRect/>
           </a:stretch>
@@ -2320,7 +2320,7 @@
           <a:chExt cx="0" cy="0"/>
         </a:xfrm>
       </p:grpSpPr>
-      <p:sp xmlns:a="http://schemas.openxmlformats.org/drawingml/2006/main" xmlns:r="http://schemas.openxmlformats.org/officeDocument/2006/relationships" xmlns:p="http://schemas.openxmlformats.org/presentationml/2006/main">
+      <p:sp>
         <p:nvSpPr>
           <p:cNvPr id="2" name="Title 1"/>
           <p:cNvSpPr>
@@ -2347,7 +2347,7 @@
           </a:p>
         </p:txBody>
       </p:sp>
-      <p:sp xmlns:a="http://schemas.openxmlformats.org/drawingml/2006/main" xmlns:r="http://schemas.openxmlformats.org/officeDocument/2006/relationships" xmlns:p="http://schemas.openxmlformats.org/presentationml/2006/main">
+      <p:sp>
         <p:nvSpPr>
           <p:cNvPr id="3" name="Content Placeholder 2"/>
           <p:cNvSpPr>
@@ -2470,7 +2470,7 @@
           <a:chExt cx="0" cy="0"/>
         </a:xfrm>
       </p:grpSpPr>
-      <p:sp xmlns:a="http://schemas.openxmlformats.org/drawingml/2006/main" xmlns:r="http://schemas.openxmlformats.org/officeDocument/2006/relationships" xmlns:p="http://schemas.openxmlformats.org/presentationml/2006/main">
+      <p:sp>
         <p:nvSpPr>
           <p:cNvPr id="2" name="Title 1"/>
           <p:cNvSpPr>
@@ -2497,7 +2497,7 @@
           </a:p>
         </p:txBody>
       </p:sp>
-      <p:pic xmlns:a="http://schemas.openxmlformats.org/drawingml/2006/main" xmlns:r="http://schemas.openxmlformats.org/officeDocument/2006/relationships" xmlns:p="http://schemas.openxmlformats.org/presentationml/2006/main">
+      <p:pic>
         <p:nvPicPr>
           <p:cNvPr id="3" name="" descr=""/>
           <p:cNvPicPr>
@@ -2548,7 +2548,7 @@
           <a:chExt cx="0" cy="0"/>
         </a:xfrm>
       </p:grpSpPr>
-      <p:sp xmlns:a="http://schemas.openxmlformats.org/drawingml/2006/main" xmlns:r="http://schemas.openxmlformats.org/officeDocument/2006/relationships" xmlns:p="http://schemas.openxmlformats.org/presentationml/2006/main">
+      <p:sp>
         <p:nvSpPr>
           <p:cNvPr id="2" name="Title 1"/>
           <p:cNvSpPr>
@@ -2575,7 +2575,7 @@
           </a:p>
         </p:txBody>
       </p:sp>
-      <p:pic xmlns:a="http://schemas.openxmlformats.org/drawingml/2006/main" xmlns:r="http://schemas.openxmlformats.org/officeDocument/2006/relationships" xmlns:p="http://schemas.openxmlformats.org/presentationml/2006/main">
+      <p:pic>
         <p:nvPicPr>
           <p:cNvPr id="3" name="" descr=""/>
           <p:cNvPicPr>
@@ -2626,7 +2626,7 @@
           <a:chExt cx="0" cy="0"/>
         </a:xfrm>
       </p:grpSpPr>
-      <p:sp xmlns:a="http://schemas.openxmlformats.org/drawingml/2006/main" xmlns:r="http://schemas.openxmlformats.org/officeDocument/2006/relationships" xmlns:p="http://schemas.openxmlformats.org/presentationml/2006/main">
+      <p:sp>
         <p:nvSpPr>
           <p:cNvPr id="2" name="Title 1"/>
           <p:cNvSpPr>
@@ -2653,7 +2653,7 @@
           </a:p>
         </p:txBody>
       </p:sp>
-      <p:sp xmlns:a="http://schemas.openxmlformats.org/drawingml/2006/main" xmlns:r="http://schemas.openxmlformats.org/officeDocument/2006/relationships" xmlns:p="http://schemas.openxmlformats.org/presentationml/2006/main">
+      <p:sp>
         <p:nvSpPr>
           <p:cNvPr id="3" name="Text Placeholder 4"/>
           <p:cNvSpPr>
@@ -2680,7 +2680,7 @@
           </a:p>
         </p:txBody>
       </p:sp>
-      <p:sp xmlns:a="http://schemas.openxmlformats.org/drawingml/2006/main" xmlns:r="http://schemas.openxmlformats.org/officeDocument/2006/relationships" xmlns:p="http://schemas.openxmlformats.org/presentationml/2006/main">
+      <p:sp>
         <p:nvSpPr>
           <p:cNvPr id="4" name="Text Placeholder 2"/>
           <p:cNvSpPr>
@@ -2707,7 +2707,7 @@
           </a:p>
         </p:txBody>
       </p:sp>
-      <p:pic xmlns:a="http://schemas.openxmlformats.org/drawingml/2006/main" xmlns:r="http://schemas.openxmlformats.org/officeDocument/2006/relationships" xmlns:p="http://schemas.openxmlformats.org/presentationml/2006/main">
+      <p:pic>
         <p:nvPicPr>
           <p:cNvPr id="5" name="" descr=""/>
           <p:cNvPicPr>
@@ -2733,7 +2733,7 @@
           </a:prstGeom>
         </p:spPr>
       </p:pic>
-      <p:pic xmlns:a="http://schemas.openxmlformats.org/drawingml/2006/main" xmlns:r="http://schemas.openxmlformats.org/officeDocument/2006/relationships" xmlns:p="http://schemas.openxmlformats.org/presentationml/2006/main">
+      <p:pic>
         <p:nvPicPr>
           <p:cNvPr id="6" name="" descr=""/>
           <p:cNvPicPr>
@@ -2744,7 +2744,7 @@
           </p:nvPr>
         </p:nvPicPr>
         <p:blipFill>
-          <a:blip cstate="print" r:embed="rId3"/>
+          <a:blip cstate="print" r:embed="rId2"/>
           <a:stretch>
             <a:fillRect/>
           </a:stretch>
@@ -2784,7 +2784,7 @@
           <a:chExt cx="0" cy="0"/>
         </a:xfrm>
       </p:grpSpPr>
-      <p:sp xmlns:a="http://schemas.openxmlformats.org/drawingml/2006/main" xmlns:r="http://schemas.openxmlformats.org/officeDocument/2006/relationships" xmlns:p="http://schemas.openxmlformats.org/presentationml/2006/main">
+      <p:sp>
         <p:nvSpPr>
           <p:cNvPr id="2" name="Title 1"/>
           <p:cNvSpPr>
@@ -2811,7 +2811,7 @@
           </a:p>
         </p:txBody>
       </p:sp>
-      <p:sp xmlns:a="http://schemas.openxmlformats.org/drawingml/2006/main" xmlns:r="http://schemas.openxmlformats.org/officeDocument/2006/relationships" xmlns:p="http://schemas.openxmlformats.org/presentationml/2006/main">
+      <p:sp>
         <p:nvSpPr>
           <p:cNvPr id="3" name="Text Placeholder 4"/>
           <p:cNvSpPr>
@@ -2838,7 +2838,7 @@
           </a:p>
         </p:txBody>
       </p:sp>
-      <p:sp xmlns:a="http://schemas.openxmlformats.org/drawingml/2006/main" xmlns:r="http://schemas.openxmlformats.org/officeDocument/2006/relationships" xmlns:p="http://schemas.openxmlformats.org/presentationml/2006/main">
+      <p:sp>
         <p:nvSpPr>
           <p:cNvPr id="4" name="Text Placeholder 2"/>
           <p:cNvSpPr>
@@ -2865,7 +2865,7 @@
           </a:p>
         </p:txBody>
       </p:sp>
-      <p:pic xmlns:a="http://schemas.openxmlformats.org/drawingml/2006/main" xmlns:r="http://schemas.openxmlformats.org/officeDocument/2006/relationships" xmlns:p="http://schemas.openxmlformats.org/presentationml/2006/main">
+      <p:pic>
         <p:nvPicPr>
           <p:cNvPr id="5" name="" descr=""/>
           <p:cNvPicPr>
@@ -2891,7 +2891,7 @@
           </a:prstGeom>
         </p:spPr>
       </p:pic>
-      <p:pic xmlns:a="http://schemas.openxmlformats.org/drawingml/2006/main" xmlns:r="http://schemas.openxmlformats.org/officeDocument/2006/relationships" xmlns:p="http://schemas.openxmlformats.org/presentationml/2006/main">
+      <p:pic>
         <p:nvPicPr>
           <p:cNvPr id="6" name="" descr=""/>
           <p:cNvPicPr>
@@ -2902,7 +2902,7 @@
           </p:nvPr>
         </p:nvPicPr>
         <p:blipFill>
-          <a:blip cstate="print" r:embed="rId3"/>
+          <a:blip cstate="print" r:embed="rId2"/>
           <a:stretch>
             <a:fillRect/>
           </a:stretch>
@@ -2942,7 +2942,7 @@
           <a:chExt cx="0" cy="0"/>
         </a:xfrm>
       </p:grpSpPr>
-      <p:sp xmlns:a="http://schemas.openxmlformats.org/drawingml/2006/main" xmlns:r="http://schemas.openxmlformats.org/officeDocument/2006/relationships" xmlns:p="http://schemas.openxmlformats.org/presentationml/2006/main">
+      <p:sp>
         <p:nvSpPr>
           <p:cNvPr id="2" name="Title 1"/>
           <p:cNvSpPr>
@@ -2969,7 +2969,7 @@
           </a:p>
         </p:txBody>
       </p:sp>
-      <p:sp xmlns:a="http://schemas.openxmlformats.org/drawingml/2006/main" xmlns:r="http://schemas.openxmlformats.org/officeDocument/2006/relationships" xmlns:p="http://schemas.openxmlformats.org/presentationml/2006/main">
+      <p:sp>
         <p:nvSpPr>
           <p:cNvPr id="3" name="Text Placeholder 4"/>
           <p:cNvSpPr>
@@ -2996,7 +2996,7 @@
           </a:p>
         </p:txBody>
       </p:sp>
-      <p:sp xmlns:a="http://schemas.openxmlformats.org/drawingml/2006/main" xmlns:r="http://schemas.openxmlformats.org/officeDocument/2006/relationships" xmlns:p="http://schemas.openxmlformats.org/presentationml/2006/main">
+      <p:sp>
         <p:nvSpPr>
           <p:cNvPr id="4" name="Text Placeholder 2"/>
           <p:cNvSpPr>
@@ -3023,7 +3023,7 @@
           </a:p>
         </p:txBody>
       </p:sp>
-      <p:pic xmlns:a="http://schemas.openxmlformats.org/drawingml/2006/main" xmlns:r="http://schemas.openxmlformats.org/officeDocument/2006/relationships" xmlns:p="http://schemas.openxmlformats.org/presentationml/2006/main">
+      <p:pic>
         <p:nvPicPr>
           <p:cNvPr id="5" name="" descr=""/>
           <p:cNvPicPr>
@@ -3049,7 +3049,7 @@
           </a:prstGeom>
         </p:spPr>
       </p:pic>
-      <p:pic xmlns:a="http://schemas.openxmlformats.org/drawingml/2006/main" xmlns:r="http://schemas.openxmlformats.org/officeDocument/2006/relationships" xmlns:p="http://schemas.openxmlformats.org/presentationml/2006/main">
+      <p:pic>
         <p:nvPicPr>
           <p:cNvPr id="6" name="" descr=""/>
           <p:cNvPicPr>
@@ -3060,7 +3060,7 @@
           </p:nvPr>
         </p:nvPicPr>
         <p:blipFill>
-          <a:blip cstate="print" r:embed="rId3"/>
+          <a:blip cstate="print" r:embed="rId2"/>
           <a:stretch>
             <a:fillRect/>
           </a:stretch>
@@ -3100,7 +3100,7 @@
           <a:chExt cx="0" cy="0"/>
         </a:xfrm>
       </p:grpSpPr>
-      <p:sp xmlns:a="http://schemas.openxmlformats.org/drawingml/2006/main" xmlns:r="http://schemas.openxmlformats.org/officeDocument/2006/relationships" xmlns:p="http://schemas.openxmlformats.org/presentationml/2006/main">
+      <p:sp>
         <p:nvSpPr>
           <p:cNvPr id="2" name="Title 1"/>
           <p:cNvSpPr>
@@ -3127,7 +3127,7 @@
           </a:p>
         </p:txBody>
       </p:sp>
-      <p:sp xmlns:a="http://schemas.openxmlformats.org/drawingml/2006/main" xmlns:r="http://schemas.openxmlformats.org/officeDocument/2006/relationships" xmlns:p="http://schemas.openxmlformats.org/presentationml/2006/main">
+      <p:sp>
         <p:nvSpPr>
           <p:cNvPr id="3" name="Text Placeholder 4"/>
           <p:cNvSpPr>
@@ -3154,7 +3154,7 @@
           </a:p>
         </p:txBody>
       </p:sp>
-      <p:sp xmlns:a="http://schemas.openxmlformats.org/drawingml/2006/main" xmlns:r="http://schemas.openxmlformats.org/officeDocument/2006/relationships" xmlns:p="http://schemas.openxmlformats.org/presentationml/2006/main">
+      <p:sp>
         <p:nvSpPr>
           <p:cNvPr id="4" name="Text Placeholder 2"/>
           <p:cNvSpPr>
@@ -3181,7 +3181,7 @@
           </a:p>
         </p:txBody>
       </p:sp>
-      <p:pic xmlns:a="http://schemas.openxmlformats.org/drawingml/2006/main" xmlns:r="http://schemas.openxmlformats.org/officeDocument/2006/relationships" xmlns:p="http://schemas.openxmlformats.org/presentationml/2006/main">
+      <p:pic>
         <p:nvPicPr>
           <p:cNvPr id="5" name="" descr=""/>
           <p:cNvPicPr>
@@ -3207,7 +3207,7 @@
           </a:prstGeom>
         </p:spPr>
       </p:pic>
-      <p:pic xmlns:a="http://schemas.openxmlformats.org/drawingml/2006/main" xmlns:r="http://schemas.openxmlformats.org/officeDocument/2006/relationships" xmlns:p="http://schemas.openxmlformats.org/presentationml/2006/main">
+      <p:pic>
         <p:nvPicPr>
           <p:cNvPr id="6" name="" descr=""/>
           <p:cNvPicPr>
@@ -3218,7 +3218,7 @@
           </p:nvPr>
         </p:nvPicPr>
         <p:blipFill>
-          <a:blip cstate="print" r:embed="rId3"/>
+          <a:blip cstate="print" r:embed="rId2"/>
           <a:stretch>
             <a:fillRect/>
           </a:stretch>
@@ -3258,7 +3258,7 @@
           <a:chExt cx="0" cy="0"/>
         </a:xfrm>
       </p:grpSpPr>
-      <p:sp xmlns:a="http://schemas.openxmlformats.org/drawingml/2006/main" xmlns:r="http://schemas.openxmlformats.org/officeDocument/2006/relationships" xmlns:p="http://schemas.openxmlformats.org/presentationml/2006/main">
+      <p:sp>
         <p:nvSpPr>
           <p:cNvPr id="2" name="Title 1"/>
           <p:cNvSpPr>
@@ -3285,7 +3285,7 @@
           </a:p>
         </p:txBody>
       </p:sp>
-      <p:sp xmlns:a="http://schemas.openxmlformats.org/drawingml/2006/main" xmlns:r="http://schemas.openxmlformats.org/officeDocument/2006/relationships" xmlns:p="http://schemas.openxmlformats.org/presentationml/2006/main">
+      <p:sp>
         <p:nvSpPr>
           <p:cNvPr id="3" name="Text Placeholder 4"/>
           <p:cNvSpPr>
@@ -3307,12 +3307,12 @@
           <a:p>
             <a:r>
               <a:rPr/>
-              <a:t>Differential FDR&lt;0.25</a:t>
-            </a:r>
-          </a:p>
-        </p:txBody>
-      </p:sp>
-      <p:sp xmlns:a="http://schemas.openxmlformats.org/drawingml/2006/main" xmlns:r="http://schemas.openxmlformats.org/officeDocument/2006/relationships" xmlns:p="http://schemas.openxmlformats.org/presentationml/2006/main">
+              <a:t>Differential fdr&lt;0.25</a:t>
+            </a:r>
+          </a:p>
+        </p:txBody>
+      </p:sp>
+      <p:sp>
         <p:nvSpPr>
           <p:cNvPr id="4" name="Text Placeholder 2"/>
           <p:cNvSpPr>
@@ -3334,12 +3334,12 @@
           <a:p>
             <a:r>
               <a:rPr/>
-              <a:t>Complete Set FDR=1</a:t>
-            </a:r>
-          </a:p>
-        </p:txBody>
-      </p:sp>
-      <p:pic xmlns:a="http://schemas.openxmlformats.org/drawingml/2006/main" xmlns:r="http://schemas.openxmlformats.org/officeDocument/2006/relationships" xmlns:p="http://schemas.openxmlformats.org/presentationml/2006/main">
+              <a:t>Complete Set fdr=1</a:t>
+            </a:r>
+          </a:p>
+        </p:txBody>
+      </p:sp>
+      <p:pic>
         <p:nvPicPr>
           <p:cNvPr id="5" name="" descr=""/>
           <p:cNvPicPr>
@@ -3365,7 +3365,7 @@
           </a:prstGeom>
         </p:spPr>
       </p:pic>
-      <p:pic xmlns:a="http://schemas.openxmlformats.org/drawingml/2006/main" xmlns:r="http://schemas.openxmlformats.org/officeDocument/2006/relationships" xmlns:p="http://schemas.openxmlformats.org/presentationml/2006/main">
+      <p:pic>
         <p:nvPicPr>
           <p:cNvPr id="6" name="" descr=""/>
           <p:cNvPicPr>
